--- a/assets/logos/logo.pptx
+++ b/assets/logos/logo.pptx
@@ -104,6 +104,11 @@
       </a:defRPr>
     </a:lvl9pPr>
   </p:defaultTextStyle>
+  <p:extLst>
+    <p:ext uri="{EFAFB233-063F-42B5-8137-9DF3F51BA10A}">
+      <p15:sldGuideLst xmlns:p15="http://schemas.microsoft.com/office/powerpoint/2012/main"/>
+    </p:ext>
+  </p:extLst>
 </p:presentation>
 </file>
 
@@ -256,7 +261,7 @@
           <a:p>
             <a:fld id="{C14DCD03-8C1F-AB40-BFF5-F772A1174ACE}" type="datetimeFigureOut">
               <a:rPr lang="en-IE" smtClean="0"/>
-              <a:t>02/08/2026</a:t>
+              <a:t>25/08/2026</a:t>
             </a:fld>
             <a:endParaRPr lang="en-IE"/>
           </a:p>
@@ -456,7 +461,7 @@
           <a:p>
             <a:fld id="{C14DCD03-8C1F-AB40-BFF5-F772A1174ACE}" type="datetimeFigureOut">
               <a:rPr lang="en-IE" smtClean="0"/>
-              <a:t>02/08/2026</a:t>
+              <a:t>25/08/2026</a:t>
             </a:fld>
             <a:endParaRPr lang="en-IE"/>
           </a:p>
@@ -666,7 +671,7 @@
           <a:p>
             <a:fld id="{C14DCD03-8C1F-AB40-BFF5-F772A1174ACE}" type="datetimeFigureOut">
               <a:rPr lang="en-IE" smtClean="0"/>
-              <a:t>02/08/2026</a:t>
+              <a:t>25/08/2026</a:t>
             </a:fld>
             <a:endParaRPr lang="en-IE"/>
           </a:p>
@@ -866,7 +871,7 @@
           <a:p>
             <a:fld id="{C14DCD03-8C1F-AB40-BFF5-F772A1174ACE}" type="datetimeFigureOut">
               <a:rPr lang="en-IE" smtClean="0"/>
-              <a:t>02/08/2026</a:t>
+              <a:t>25/08/2026</a:t>
             </a:fld>
             <a:endParaRPr lang="en-IE"/>
           </a:p>
@@ -1142,7 +1147,7 @@
           <a:p>
             <a:fld id="{C14DCD03-8C1F-AB40-BFF5-F772A1174ACE}" type="datetimeFigureOut">
               <a:rPr lang="en-IE" smtClean="0"/>
-              <a:t>02/08/2026</a:t>
+              <a:t>25/08/2026</a:t>
             </a:fld>
             <a:endParaRPr lang="en-IE"/>
           </a:p>
@@ -1410,7 +1415,7 @@
           <a:p>
             <a:fld id="{C14DCD03-8C1F-AB40-BFF5-F772A1174ACE}" type="datetimeFigureOut">
               <a:rPr lang="en-IE" smtClean="0"/>
-              <a:t>02/08/2026</a:t>
+              <a:t>25/08/2026</a:t>
             </a:fld>
             <a:endParaRPr lang="en-IE"/>
           </a:p>
@@ -1825,7 +1830,7 @@
           <a:p>
             <a:fld id="{C14DCD03-8C1F-AB40-BFF5-F772A1174ACE}" type="datetimeFigureOut">
               <a:rPr lang="en-IE" smtClean="0"/>
-              <a:t>02/08/2026</a:t>
+              <a:t>25/08/2026</a:t>
             </a:fld>
             <a:endParaRPr lang="en-IE"/>
           </a:p>
@@ -1967,7 +1972,7 @@
           <a:p>
             <a:fld id="{C14DCD03-8C1F-AB40-BFF5-F772A1174ACE}" type="datetimeFigureOut">
               <a:rPr lang="en-IE" smtClean="0"/>
-              <a:t>02/08/2026</a:t>
+              <a:t>25/08/2026</a:t>
             </a:fld>
             <a:endParaRPr lang="en-IE"/>
           </a:p>
@@ -2080,7 +2085,7 @@
           <a:p>
             <a:fld id="{C14DCD03-8C1F-AB40-BFF5-F772A1174ACE}" type="datetimeFigureOut">
               <a:rPr lang="en-IE" smtClean="0"/>
-              <a:t>02/08/2026</a:t>
+              <a:t>25/08/2026</a:t>
             </a:fld>
             <a:endParaRPr lang="en-IE"/>
           </a:p>
@@ -2393,7 +2398,7 @@
           <a:p>
             <a:fld id="{C14DCD03-8C1F-AB40-BFF5-F772A1174ACE}" type="datetimeFigureOut">
               <a:rPr lang="en-IE" smtClean="0"/>
-              <a:t>02/08/2026</a:t>
+              <a:t>25/08/2026</a:t>
             </a:fld>
             <a:endParaRPr lang="en-IE"/>
           </a:p>
@@ -2682,7 +2687,7 @@
           <a:p>
             <a:fld id="{C14DCD03-8C1F-AB40-BFF5-F772A1174ACE}" type="datetimeFigureOut">
               <a:rPr lang="en-IE" smtClean="0"/>
-              <a:t>02/08/2026</a:t>
+              <a:t>25/08/2026</a:t>
             </a:fld>
             <a:endParaRPr lang="en-IE"/>
           </a:p>
@@ -2925,7 +2930,7 @@
           <a:p>
             <a:fld id="{C14DCD03-8C1F-AB40-BFF5-F772A1174ACE}" type="datetimeFigureOut">
               <a:rPr lang="en-IE" smtClean="0"/>
-              <a:t>02/08/2026</a:t>
+              <a:t>25/08/2026</a:t>
             </a:fld>
             <a:endParaRPr lang="en-IE"/>
           </a:p>
@@ -4207,6 +4212,756 @@
           </a:prstGeom>
         </p:spPr>
       </p:pic>
+      <p:grpSp>
+        <p:nvGrpSpPr>
+          <p:cNvPr id="2" name="Group 1">
+            <a:extLst>
+              <a:ext uri="{FF2B5EF4-FFF2-40B4-BE49-F238E27FC236}">
+                <a16:creationId xmlns:a16="http://schemas.microsoft.com/office/drawing/2014/main" id="{5F95971A-AC25-D7F3-17D5-AD0D738048F8}"/>
+              </a:ext>
+            </a:extLst>
+          </p:cNvPr>
+          <p:cNvGrpSpPr/>
+          <p:nvPr/>
+        </p:nvGrpSpPr>
+        <p:grpSpPr>
+          <a:xfrm>
+            <a:off x="9545984" y="987501"/>
+            <a:ext cx="1007880" cy="504233"/>
+            <a:chOff x="4230569" y="2084037"/>
+            <a:chExt cx="1007880" cy="504233"/>
+          </a:xfrm>
+        </p:grpSpPr>
+        <p:grpSp>
+          <p:nvGrpSpPr>
+            <p:cNvPr id="23" name="Group 22">
+              <a:extLst>
+                <a:ext uri="{FF2B5EF4-FFF2-40B4-BE49-F238E27FC236}">
+                  <a16:creationId xmlns:a16="http://schemas.microsoft.com/office/drawing/2014/main" id="{80571A3A-2EDB-16A2-7C1F-FE65974FA03D}"/>
+                </a:ext>
+              </a:extLst>
+            </p:cNvPr>
+            <p:cNvGrpSpPr/>
+            <p:nvPr/>
+          </p:nvGrpSpPr>
+          <p:grpSpPr>
+            <a:xfrm>
+              <a:off x="4230569" y="2231772"/>
+              <a:ext cx="203090" cy="200730"/>
+              <a:chOff x="4905204" y="2810880"/>
+              <a:chExt cx="332545" cy="341394"/>
+            </a:xfrm>
+          </p:grpSpPr>
+          <p:sp>
+            <p:nvSpPr>
+              <p:cNvPr id="35" name="Block Arc 34">
+                <a:extLst>
+                  <a:ext uri="{FF2B5EF4-FFF2-40B4-BE49-F238E27FC236}">
+                    <a16:creationId xmlns:a16="http://schemas.microsoft.com/office/drawing/2014/main" id="{431647E2-8F78-3CC3-4033-9E51DE419B02}"/>
+                  </a:ext>
+                </a:extLst>
+              </p:cNvPr>
+              <p:cNvSpPr/>
+              <p:nvPr/>
+            </p:nvSpPr>
+            <p:spPr>
+              <a:xfrm>
+                <a:off x="4905205" y="2810880"/>
+                <a:ext cx="332544" cy="341394"/>
+              </a:xfrm>
+              <a:prstGeom prst="blockArc">
+                <a:avLst>
+                  <a:gd name="adj1" fmla="val 10800000"/>
+                  <a:gd name="adj2" fmla="val 10796331"/>
+                  <a:gd name="adj3" fmla="val 7653"/>
+                </a:avLst>
+              </a:prstGeom>
+              <a:solidFill>
+                <a:schemeClr val="accent3">
+                  <a:lumMod val="60000"/>
+                  <a:lumOff val="40000"/>
+                </a:schemeClr>
+              </a:solidFill>
+              <a:ln>
+                <a:noFill/>
+              </a:ln>
+            </p:spPr>
+            <p:style>
+              <a:lnRef idx="2">
+                <a:schemeClr val="accent1">
+                  <a:shade val="15000"/>
+                </a:schemeClr>
+              </a:lnRef>
+              <a:fillRef idx="1">
+                <a:schemeClr val="accent1"/>
+              </a:fillRef>
+              <a:effectRef idx="0">
+                <a:schemeClr val="accent1"/>
+              </a:effectRef>
+              <a:fontRef idx="minor">
+                <a:schemeClr val="lt1"/>
+              </a:fontRef>
+            </p:style>
+            <p:txBody>
+              <a:bodyPr rtlCol="0" anchor="ctr"/>
+              <a:lstStyle/>
+              <a:p>
+                <a:pPr algn="ctr"/>
+                <a:endParaRPr lang="en-IE">
+                  <a:solidFill>
+                    <a:schemeClr val="tx1"/>
+                  </a:solidFill>
+                </a:endParaRPr>
+              </a:p>
+            </p:txBody>
+          </p:sp>
+          <p:sp>
+            <p:nvSpPr>
+              <p:cNvPr id="36" name="Block Arc 35">
+                <a:extLst>
+                  <a:ext uri="{FF2B5EF4-FFF2-40B4-BE49-F238E27FC236}">
+                    <a16:creationId xmlns:a16="http://schemas.microsoft.com/office/drawing/2014/main" id="{C09D08BA-610B-4E19-B25C-C6DB8BF2B144}"/>
+                  </a:ext>
+                </a:extLst>
+              </p:cNvPr>
+              <p:cNvSpPr/>
+              <p:nvPr/>
+            </p:nvSpPr>
+            <p:spPr>
+              <a:xfrm>
+                <a:off x="4905205" y="2810880"/>
+                <a:ext cx="332544" cy="341394"/>
+              </a:xfrm>
+              <a:prstGeom prst="blockArc">
+                <a:avLst>
+                  <a:gd name="adj1" fmla="val 10800000"/>
+                  <a:gd name="adj2" fmla="val 9515080"/>
+                  <a:gd name="adj3" fmla="val 7659"/>
+                </a:avLst>
+              </a:prstGeom>
+              <a:solidFill>
+                <a:schemeClr val="accent5"/>
+              </a:solidFill>
+              <a:ln>
+                <a:noFill/>
+              </a:ln>
+            </p:spPr>
+            <p:style>
+              <a:lnRef idx="2">
+                <a:schemeClr val="accent1">
+                  <a:shade val="15000"/>
+                </a:schemeClr>
+              </a:lnRef>
+              <a:fillRef idx="1">
+                <a:schemeClr val="accent1"/>
+              </a:fillRef>
+              <a:effectRef idx="0">
+                <a:schemeClr val="accent1"/>
+              </a:effectRef>
+              <a:fontRef idx="minor">
+                <a:schemeClr val="lt1"/>
+              </a:fontRef>
+            </p:style>
+            <p:txBody>
+              <a:bodyPr rtlCol="0" anchor="ctr"/>
+              <a:lstStyle/>
+              <a:p>
+                <a:pPr algn="ctr"/>
+                <a:endParaRPr lang="en-IE">
+                  <a:solidFill>
+                    <a:schemeClr val="tx1"/>
+                  </a:solidFill>
+                </a:endParaRPr>
+              </a:p>
+            </p:txBody>
+          </p:sp>
+          <p:sp>
+            <p:nvSpPr>
+              <p:cNvPr id="37" name="Block Arc 36">
+                <a:extLst>
+                  <a:ext uri="{FF2B5EF4-FFF2-40B4-BE49-F238E27FC236}">
+                    <a16:creationId xmlns:a16="http://schemas.microsoft.com/office/drawing/2014/main" id="{DEE3607B-442D-FFFE-1F5A-2D4E630E97FC}"/>
+                  </a:ext>
+                </a:extLst>
+              </p:cNvPr>
+              <p:cNvSpPr/>
+              <p:nvPr/>
+            </p:nvSpPr>
+            <p:spPr>
+              <a:xfrm>
+                <a:off x="4905204" y="2810880"/>
+                <a:ext cx="332544" cy="341394"/>
+              </a:xfrm>
+              <a:prstGeom prst="blockArc">
+                <a:avLst>
+                  <a:gd name="adj1" fmla="val 10800000"/>
+                  <a:gd name="adj2" fmla="val 19677901"/>
+                  <a:gd name="adj3" fmla="val 7765"/>
+                </a:avLst>
+              </a:prstGeom>
+              <a:solidFill>
+                <a:schemeClr val="accent4"/>
+              </a:solidFill>
+              <a:ln>
+                <a:noFill/>
+              </a:ln>
+            </p:spPr>
+            <p:style>
+              <a:lnRef idx="2">
+                <a:schemeClr val="accent1">
+                  <a:shade val="15000"/>
+                </a:schemeClr>
+              </a:lnRef>
+              <a:fillRef idx="1">
+                <a:schemeClr val="accent1"/>
+              </a:fillRef>
+              <a:effectRef idx="0">
+                <a:schemeClr val="accent1"/>
+              </a:effectRef>
+              <a:fontRef idx="minor">
+                <a:schemeClr val="lt1"/>
+              </a:fontRef>
+            </p:style>
+            <p:txBody>
+              <a:bodyPr rtlCol="0" anchor="ctr"/>
+              <a:lstStyle/>
+              <a:p>
+                <a:pPr algn="ctr"/>
+                <a:endParaRPr lang="en-IE" dirty="0">
+                  <a:solidFill>
+                    <a:schemeClr val="tx1"/>
+                  </a:solidFill>
+                </a:endParaRPr>
+              </a:p>
+            </p:txBody>
+          </p:sp>
+        </p:grpSp>
+        <p:sp>
+          <p:nvSpPr>
+            <p:cNvPr id="24" name="Oval 23">
+              <a:extLst>
+                <a:ext uri="{FF2B5EF4-FFF2-40B4-BE49-F238E27FC236}">
+                  <a16:creationId xmlns:a16="http://schemas.microsoft.com/office/drawing/2014/main" id="{391821DE-EC72-9156-3860-F7323E10B833}"/>
+                </a:ext>
+              </a:extLst>
+            </p:cNvPr>
+            <p:cNvSpPr/>
+            <p:nvPr/>
+          </p:nvSpPr>
+          <p:spPr>
+            <a:xfrm>
+              <a:off x="4455571" y="2118167"/>
+              <a:ext cx="108030" cy="107939"/>
+            </a:xfrm>
+            <a:prstGeom prst="ellipse">
+              <a:avLst/>
+            </a:prstGeom>
+            <a:ln>
+              <a:noFill/>
+            </a:ln>
+          </p:spPr>
+          <p:style>
+            <a:lnRef idx="2">
+              <a:schemeClr val="accent1">
+                <a:shade val="15000"/>
+              </a:schemeClr>
+            </a:lnRef>
+            <a:fillRef idx="1">
+              <a:schemeClr val="accent1"/>
+            </a:fillRef>
+            <a:effectRef idx="0">
+              <a:schemeClr val="accent1"/>
+            </a:effectRef>
+            <a:fontRef idx="minor">
+              <a:schemeClr val="lt1"/>
+            </a:fontRef>
+          </p:style>
+          <p:txBody>
+            <a:bodyPr rtlCol="0" anchor="ctr"/>
+            <a:lstStyle/>
+            <a:p>
+              <a:pPr algn="ctr"/>
+              <a:endParaRPr lang="en-IE"/>
+            </a:p>
+          </p:txBody>
+        </p:sp>
+        <p:sp>
+          <p:nvSpPr>
+            <p:cNvPr id="25" name="Oval 24">
+              <a:extLst>
+                <a:ext uri="{FF2B5EF4-FFF2-40B4-BE49-F238E27FC236}">
+                  <a16:creationId xmlns:a16="http://schemas.microsoft.com/office/drawing/2014/main" id="{432606D3-9B06-C2CF-18F9-CCBE9D90010F}"/>
+                </a:ext>
+              </a:extLst>
+            </p:cNvPr>
+            <p:cNvSpPr/>
+            <p:nvPr/>
+          </p:nvSpPr>
+          <p:spPr>
+            <a:xfrm>
+              <a:off x="4615607" y="2278168"/>
+              <a:ext cx="108030" cy="107939"/>
+            </a:xfrm>
+            <a:prstGeom prst="ellipse">
+              <a:avLst/>
+            </a:prstGeom>
+            <a:solidFill>
+              <a:schemeClr val="accent1">
+                <a:lumMod val="60000"/>
+                <a:lumOff val="40000"/>
+              </a:schemeClr>
+            </a:solidFill>
+            <a:ln>
+              <a:noFill/>
+            </a:ln>
+          </p:spPr>
+          <p:style>
+            <a:lnRef idx="2">
+              <a:schemeClr val="accent1">
+                <a:shade val="15000"/>
+              </a:schemeClr>
+            </a:lnRef>
+            <a:fillRef idx="1">
+              <a:schemeClr val="accent1"/>
+            </a:fillRef>
+            <a:effectRef idx="0">
+              <a:schemeClr val="accent1"/>
+            </a:effectRef>
+            <a:fontRef idx="minor">
+              <a:schemeClr val="lt1"/>
+            </a:fontRef>
+          </p:style>
+          <p:txBody>
+            <a:bodyPr rtlCol="0" anchor="ctr"/>
+            <a:lstStyle/>
+            <a:p>
+              <a:pPr algn="ctr"/>
+              <a:endParaRPr lang="en-IE"/>
+            </a:p>
+          </p:txBody>
+        </p:sp>
+        <p:sp>
+          <p:nvSpPr>
+            <p:cNvPr id="26" name="Oval 25">
+              <a:extLst>
+                <a:ext uri="{FF2B5EF4-FFF2-40B4-BE49-F238E27FC236}">
+                  <a16:creationId xmlns:a16="http://schemas.microsoft.com/office/drawing/2014/main" id="{7241089E-6FC9-D9BA-6C83-F86F21B00F50}"/>
+                </a:ext>
+              </a:extLst>
+            </p:cNvPr>
+            <p:cNvSpPr/>
+            <p:nvPr/>
+          </p:nvSpPr>
+          <p:spPr>
+            <a:xfrm>
+              <a:off x="4972638" y="2480331"/>
+              <a:ext cx="108030" cy="107939"/>
+            </a:xfrm>
+            <a:prstGeom prst="ellipse">
+              <a:avLst/>
+            </a:prstGeom>
+            <a:solidFill>
+              <a:schemeClr val="accent5"/>
+            </a:solidFill>
+            <a:ln>
+              <a:noFill/>
+            </a:ln>
+          </p:spPr>
+          <p:style>
+            <a:lnRef idx="2">
+              <a:schemeClr val="accent1">
+                <a:shade val="15000"/>
+              </a:schemeClr>
+            </a:lnRef>
+            <a:fillRef idx="1">
+              <a:schemeClr val="accent1"/>
+            </a:fillRef>
+            <a:effectRef idx="0">
+              <a:schemeClr val="accent1"/>
+            </a:effectRef>
+            <a:fontRef idx="minor">
+              <a:schemeClr val="lt1"/>
+            </a:fontRef>
+          </p:style>
+          <p:txBody>
+            <a:bodyPr rtlCol="0" anchor="ctr"/>
+            <a:lstStyle/>
+            <a:p>
+              <a:pPr algn="ctr"/>
+              <a:endParaRPr lang="en-IE"/>
+            </a:p>
+          </p:txBody>
+        </p:sp>
+        <p:sp>
+          <p:nvSpPr>
+            <p:cNvPr id="27" name="Oval 26">
+              <a:extLst>
+                <a:ext uri="{FF2B5EF4-FFF2-40B4-BE49-F238E27FC236}">
+                  <a16:creationId xmlns:a16="http://schemas.microsoft.com/office/drawing/2014/main" id="{4D9562F9-700E-B6DD-9D67-DF3C90BD969E}"/>
+                </a:ext>
+              </a:extLst>
+            </p:cNvPr>
+            <p:cNvSpPr/>
+            <p:nvPr/>
+          </p:nvSpPr>
+          <p:spPr>
+            <a:xfrm>
+              <a:off x="4927028" y="2260465"/>
+              <a:ext cx="108030" cy="107939"/>
+            </a:xfrm>
+            <a:prstGeom prst="ellipse">
+              <a:avLst/>
+            </a:prstGeom>
+            <a:solidFill>
+              <a:schemeClr val="accent6">
+                <a:lumMod val="60000"/>
+                <a:lumOff val="40000"/>
+              </a:schemeClr>
+            </a:solidFill>
+            <a:ln>
+              <a:noFill/>
+            </a:ln>
+          </p:spPr>
+          <p:style>
+            <a:lnRef idx="2">
+              <a:schemeClr val="accent1">
+                <a:shade val="15000"/>
+              </a:schemeClr>
+            </a:lnRef>
+            <a:fillRef idx="1">
+              <a:schemeClr val="accent1"/>
+            </a:fillRef>
+            <a:effectRef idx="0">
+              <a:schemeClr val="accent1"/>
+            </a:effectRef>
+            <a:fontRef idx="minor">
+              <a:schemeClr val="lt1"/>
+            </a:fontRef>
+          </p:style>
+          <p:txBody>
+            <a:bodyPr rtlCol="0" anchor="ctr"/>
+            <a:lstStyle/>
+            <a:p>
+              <a:pPr algn="ctr"/>
+              <a:endParaRPr lang="en-IE"/>
+            </a:p>
+          </p:txBody>
+        </p:sp>
+        <p:sp>
+          <p:nvSpPr>
+            <p:cNvPr id="28" name="Oval 27">
+              <a:extLst>
+                <a:ext uri="{FF2B5EF4-FFF2-40B4-BE49-F238E27FC236}">
+                  <a16:creationId xmlns:a16="http://schemas.microsoft.com/office/drawing/2014/main" id="{0CB7924E-0F71-122E-EEF7-2C6F203BF46A}"/>
+                </a:ext>
+              </a:extLst>
+            </p:cNvPr>
+            <p:cNvSpPr/>
+            <p:nvPr/>
+          </p:nvSpPr>
+          <p:spPr>
+            <a:xfrm>
+              <a:off x="4727647" y="2084037"/>
+              <a:ext cx="83340" cy="77359"/>
+            </a:xfrm>
+            <a:prstGeom prst="ellipse">
+              <a:avLst/>
+            </a:prstGeom>
+            <a:ln>
+              <a:noFill/>
+            </a:ln>
+          </p:spPr>
+          <p:style>
+            <a:lnRef idx="2">
+              <a:schemeClr val="accent1">
+                <a:shade val="15000"/>
+              </a:schemeClr>
+            </a:lnRef>
+            <a:fillRef idx="1">
+              <a:schemeClr val="accent1"/>
+            </a:fillRef>
+            <a:effectRef idx="0">
+              <a:schemeClr val="accent1"/>
+            </a:effectRef>
+            <a:fontRef idx="minor">
+              <a:schemeClr val="lt1"/>
+            </a:fontRef>
+          </p:style>
+          <p:txBody>
+            <a:bodyPr rtlCol="0" anchor="ctr"/>
+            <a:lstStyle/>
+            <a:p>
+              <a:pPr algn="ctr"/>
+              <a:endParaRPr lang="en-IE"/>
+            </a:p>
+          </p:txBody>
+        </p:sp>
+        <p:sp>
+          <p:nvSpPr>
+            <p:cNvPr id="29" name="Oval 28">
+              <a:extLst>
+                <a:ext uri="{FF2B5EF4-FFF2-40B4-BE49-F238E27FC236}">
+                  <a16:creationId xmlns:a16="http://schemas.microsoft.com/office/drawing/2014/main" id="{C4FA30E4-D6D3-2D5B-0912-45BF8D61C37A}"/>
+                </a:ext>
+              </a:extLst>
+            </p:cNvPr>
+            <p:cNvSpPr/>
+            <p:nvPr/>
+          </p:nvSpPr>
+          <p:spPr>
+            <a:xfrm>
+              <a:off x="5155109" y="2368404"/>
+              <a:ext cx="83340" cy="77359"/>
+            </a:xfrm>
+            <a:prstGeom prst="ellipse">
+              <a:avLst/>
+            </a:prstGeom>
+            <a:solidFill>
+              <a:schemeClr val="accent2"/>
+            </a:solidFill>
+            <a:ln>
+              <a:noFill/>
+            </a:ln>
+          </p:spPr>
+          <p:style>
+            <a:lnRef idx="2">
+              <a:schemeClr val="accent1">
+                <a:shade val="15000"/>
+              </a:schemeClr>
+            </a:lnRef>
+            <a:fillRef idx="1">
+              <a:schemeClr val="accent1"/>
+            </a:fillRef>
+            <a:effectRef idx="0">
+              <a:schemeClr val="accent1"/>
+            </a:effectRef>
+            <a:fontRef idx="minor">
+              <a:schemeClr val="lt1"/>
+            </a:fontRef>
+          </p:style>
+          <p:txBody>
+            <a:bodyPr rtlCol="0" anchor="ctr"/>
+            <a:lstStyle/>
+            <a:p>
+              <a:pPr algn="ctr"/>
+              <a:endParaRPr lang="en-IE"/>
+            </a:p>
+          </p:txBody>
+        </p:sp>
+        <p:cxnSp>
+          <p:nvCxnSpPr>
+            <p:cNvPr id="30" name="Straight Connector 29">
+              <a:extLst>
+                <a:ext uri="{FF2B5EF4-FFF2-40B4-BE49-F238E27FC236}">
+                  <a16:creationId xmlns:a16="http://schemas.microsoft.com/office/drawing/2014/main" id="{EF7C3555-90E8-A31D-5FC0-1FA005ED0E32}"/>
+                </a:ext>
+              </a:extLst>
+            </p:cNvPr>
+            <p:cNvCxnSpPr>
+              <a:cxnSpLocks/>
+              <a:stCxn id="24" idx="7"/>
+              <a:endCxn id="28" idx="2"/>
+            </p:cNvCxnSpPr>
+            <p:nvPr/>
+          </p:nvCxnSpPr>
+          <p:spPr>
+            <a:xfrm flipV="1">
+              <a:off x="4547780" y="2122717"/>
+              <a:ext cx="179867" cy="11257"/>
+            </a:xfrm>
+            <a:prstGeom prst="line">
+              <a:avLst/>
+            </a:prstGeom>
+            <a:ln w="12700"/>
+          </p:spPr>
+          <p:style>
+            <a:lnRef idx="2">
+              <a:schemeClr val="accent1"/>
+            </a:lnRef>
+            <a:fillRef idx="0">
+              <a:schemeClr val="accent1"/>
+            </a:fillRef>
+            <a:effectRef idx="1">
+              <a:schemeClr val="accent1"/>
+            </a:effectRef>
+            <a:fontRef idx="minor">
+              <a:schemeClr val="tx1"/>
+            </a:fontRef>
+          </p:style>
+        </p:cxnSp>
+        <p:cxnSp>
+          <p:nvCxnSpPr>
+            <p:cNvPr id="31" name="Straight Connector 30">
+              <a:extLst>
+                <a:ext uri="{FF2B5EF4-FFF2-40B4-BE49-F238E27FC236}">
+                  <a16:creationId xmlns:a16="http://schemas.microsoft.com/office/drawing/2014/main" id="{FCB9A33D-30CE-DA36-5DFD-855690A82E2C}"/>
+                </a:ext>
+              </a:extLst>
+            </p:cNvPr>
+            <p:cNvCxnSpPr>
+              <a:cxnSpLocks/>
+              <a:stCxn id="24" idx="5"/>
+              <a:endCxn id="25" idx="1"/>
+            </p:cNvCxnSpPr>
+            <p:nvPr/>
+          </p:nvCxnSpPr>
+          <p:spPr>
+            <a:xfrm>
+              <a:off x="4547780" y="2210299"/>
+              <a:ext cx="83648" cy="83676"/>
+            </a:xfrm>
+            <a:prstGeom prst="line">
+              <a:avLst/>
+            </a:prstGeom>
+            <a:ln w="12700"/>
+          </p:spPr>
+          <p:style>
+            <a:lnRef idx="2">
+              <a:schemeClr val="accent1"/>
+            </a:lnRef>
+            <a:fillRef idx="0">
+              <a:schemeClr val="accent1"/>
+            </a:fillRef>
+            <a:effectRef idx="1">
+              <a:schemeClr val="accent1"/>
+            </a:effectRef>
+            <a:fontRef idx="minor">
+              <a:schemeClr val="tx1"/>
+            </a:fontRef>
+          </p:style>
+        </p:cxnSp>
+        <p:cxnSp>
+          <p:nvCxnSpPr>
+            <p:cNvPr id="32" name="Straight Connector 31">
+              <a:extLst>
+                <a:ext uri="{FF2B5EF4-FFF2-40B4-BE49-F238E27FC236}">
+                  <a16:creationId xmlns:a16="http://schemas.microsoft.com/office/drawing/2014/main" id="{32CAAF07-FCE0-1843-9F48-E3F67E35C7D8}"/>
+                </a:ext>
+              </a:extLst>
+            </p:cNvPr>
+            <p:cNvCxnSpPr>
+              <a:cxnSpLocks/>
+              <a:stCxn id="25" idx="5"/>
+              <a:endCxn id="26" idx="1"/>
+            </p:cNvCxnSpPr>
+            <p:nvPr/>
+          </p:nvCxnSpPr>
+          <p:spPr>
+            <a:xfrm>
+              <a:off x="4707816" y="2370300"/>
+              <a:ext cx="280643" cy="125838"/>
+            </a:xfrm>
+            <a:prstGeom prst="line">
+              <a:avLst/>
+            </a:prstGeom>
+            <a:ln w="12700">
+              <a:solidFill>
+                <a:schemeClr val="accent4"/>
+              </a:solidFill>
+            </a:ln>
+          </p:spPr>
+          <p:style>
+            <a:lnRef idx="2">
+              <a:schemeClr val="accent1"/>
+            </a:lnRef>
+            <a:fillRef idx="0">
+              <a:schemeClr val="accent1"/>
+            </a:fillRef>
+            <a:effectRef idx="1">
+              <a:schemeClr val="accent1"/>
+            </a:effectRef>
+            <a:fontRef idx="minor">
+              <a:schemeClr val="tx1"/>
+            </a:fontRef>
+          </p:style>
+        </p:cxnSp>
+        <p:cxnSp>
+          <p:nvCxnSpPr>
+            <p:cNvPr id="33" name="Straight Connector 32">
+              <a:extLst>
+                <a:ext uri="{FF2B5EF4-FFF2-40B4-BE49-F238E27FC236}">
+                  <a16:creationId xmlns:a16="http://schemas.microsoft.com/office/drawing/2014/main" id="{001F867F-0774-2B6C-1564-10A39A3415B2}"/>
+                </a:ext>
+              </a:extLst>
+            </p:cNvPr>
+            <p:cNvCxnSpPr>
+              <a:cxnSpLocks/>
+              <a:stCxn id="25" idx="7"/>
+              <a:endCxn id="27" idx="2"/>
+            </p:cNvCxnSpPr>
+            <p:nvPr/>
+          </p:nvCxnSpPr>
+          <p:spPr>
+            <a:xfrm>
+              <a:off x="4707816" y="2293975"/>
+              <a:ext cx="219212" cy="20460"/>
+            </a:xfrm>
+            <a:prstGeom prst="line">
+              <a:avLst/>
+            </a:prstGeom>
+            <a:ln w="12700">
+              <a:solidFill>
+                <a:schemeClr val="accent4"/>
+              </a:solidFill>
+            </a:ln>
+          </p:spPr>
+          <p:style>
+            <a:lnRef idx="2">
+              <a:schemeClr val="accent1"/>
+            </a:lnRef>
+            <a:fillRef idx="0">
+              <a:schemeClr val="accent1"/>
+            </a:fillRef>
+            <a:effectRef idx="1">
+              <a:schemeClr val="accent1"/>
+            </a:effectRef>
+            <a:fontRef idx="minor">
+              <a:schemeClr val="tx1"/>
+            </a:fontRef>
+          </p:style>
+        </p:cxnSp>
+        <p:cxnSp>
+          <p:nvCxnSpPr>
+            <p:cNvPr id="34" name="Straight Connector 33">
+              <a:extLst>
+                <a:ext uri="{FF2B5EF4-FFF2-40B4-BE49-F238E27FC236}">
+                  <a16:creationId xmlns:a16="http://schemas.microsoft.com/office/drawing/2014/main" id="{425106AE-EB80-704C-AD6A-2E8EBC265D4F}"/>
+                </a:ext>
+              </a:extLst>
+            </p:cNvPr>
+            <p:cNvCxnSpPr>
+              <a:cxnSpLocks/>
+              <a:stCxn id="27" idx="6"/>
+              <a:endCxn id="29" idx="1"/>
+            </p:cNvCxnSpPr>
+            <p:nvPr/>
+          </p:nvCxnSpPr>
+          <p:spPr>
+            <a:xfrm>
+              <a:off x="5035058" y="2314435"/>
+              <a:ext cx="132256" cy="65298"/>
+            </a:xfrm>
+            <a:prstGeom prst="line">
+              <a:avLst/>
+            </a:prstGeom>
+            <a:ln w="12700"/>
+          </p:spPr>
+          <p:style>
+            <a:lnRef idx="2">
+              <a:schemeClr val="accent1"/>
+            </a:lnRef>
+            <a:fillRef idx="0">
+              <a:schemeClr val="accent1"/>
+            </a:fillRef>
+            <a:effectRef idx="1">
+              <a:schemeClr val="accent1"/>
+            </a:effectRef>
+            <a:fontRef idx="minor">
+              <a:schemeClr val="tx1"/>
+            </a:fontRef>
+          </p:style>
+        </p:cxnSp>
+      </p:grpSp>
     </p:spTree>
     <p:extLst>
       <p:ext uri="{BB962C8B-B14F-4D97-AF65-F5344CB8AC3E}">
